--- a/docs/content/regression/regression_analysis_report.pptx
+++ b/docs/content/regression/regression_analysis_report.pptx
@@ -11,6 +11,11 @@
     <p:sldId id="259" r:id="rId5"/>
     <p:sldId id="260" r:id="rId6"/>
     <p:sldId id="261" r:id="rId7"/>
+    <p:sldId id="262" r:id="rId8"/>
+    <p:sldId id="263" r:id="rId9"/>
+    <p:sldId id="264" r:id="rId10"/>
+    <p:sldId id="265" r:id="rId11"/>
+    <p:sldId id="266" r:id="rId12"/>
   </p:sldIdLst>
   <p:sldSz cx="9144000" cy="5143500" type="screen16x9"/>
   <p:notesSz cx="6858000" cy="9144000"/>
@@ -3345,7 +3350,208 @@
             </a:pPr>
             <a:r>
               <a:rPr/>
-              <a:t>2026-07-05</a:t>
+              <a:t>2026-08-27</a:t>
+            </a:r>
+          </a:p>
+        </p:txBody>
+      </p:sp>
+    </p:spTree>
+  </p:cSld>
+</p:sld>
+</file>
+
+<file path=ppt/slides/slide10.xml><?xml version="1.0" encoding="utf-8"?>
+<p:sld xmlns:a="http://schemas.openxmlformats.org/drawingml/2006/main" xmlns:r="http://schemas.openxmlformats.org/officeDocument/2006/relationships" xmlns:p="http://schemas.openxmlformats.org/presentationml/2006/main">
+  <p:cSld>
+    <p:spTree>
+      <p:nvGrpSpPr>
+        <p:cNvPr id="1" name=""/>
+        <p:cNvGrpSpPr/>
+        <p:nvPr/>
+      </p:nvGrpSpPr>
+      <p:grpSpPr>
+        <a:xfrm>
+          <a:off x="0" y="0"/>
+          <a:ext cx="0" cy="0"/>
+          <a:chOff x="0" y="0"/>
+          <a:chExt cx="0" cy="0"/>
+        </a:xfrm>
+      </p:grpSpPr>
+      <p:sp>
+        <p:nvSpPr>
+          <p:cNvPr id="2" name="Title 1"/>
+          <p:cNvSpPr>
+            <a:spLocks noGrp="1"/>
+          </p:cNvSpPr>
+          <p:nvPr>
+            <p:ph type="title"/>
+          </p:nvPr>
+        </p:nvSpPr>
+        <p:spPr>
+          <a:xfrm>
+            <a:off x="0" y="0"/>
+            <a:ext cx="9144000" cy="582780"/>
+          </a:xfrm>
+        </p:spPr>
+        <p:txBody>
+          <a:bodyPr/>
+          <a:lstStyle/>
+          <a:p>
+            <a:pPr lvl="0" indent="0" marL="0">
+              <a:buNone/>
+            </a:pPr>
+            <a:r>
+              <a:rPr/>
+              <a:t>Discussion</a:t>
+            </a:r>
+          </a:p>
+        </p:txBody>
+      </p:sp>
+      <p:sp>
+        <p:nvSpPr>
+          <p:cNvPr id="3" name="Content Placeholder 2"/>
+          <p:cNvSpPr>
+            <a:spLocks noGrp="1"/>
+          </p:cNvSpPr>
+          <p:nvPr>
+            <p:ph idx="1"/>
+          </p:nvPr>
+        </p:nvSpPr>
+        <p:spPr/>
+        <p:txBody>
+          <a:bodyPr/>
+          <a:lstStyle/>
+          <a:p>
+            <a:pPr lvl="0" indent="0" marL="0">
+              <a:buNone/>
+            </a:pPr>
+            <a:r>
+              <a:rPr i="1"/>
+              <a:t>Write one short paragraph here.</a:t>
+            </a:r>
+            <a:r>
+              <a:rPr/>
+              <a:t> Did the calibration fit well (look at R² and Figure 1)? Did the residual plot and Shapiro–Wilk support the assumptions? Why is working in </a:t>
+            </a:r>
+            <a:r>
+              <a:rPr b="1"/>
+              <a:t>area</a:t>
+            </a:r>
+            <a:r>
+              <a:rPr/>
+              <a:t> (cm²) more biologically meaningful than raw </a:t>
+            </a:r>
+            <a:r>
+              <a:rPr b="1"/>
+              <a:t>mass</a:t>
+            </a:r>
+            <a:r>
+              <a:rPr/>
+              <a:t> (g) when comparing sunny and shady leaves? This is where you paste the results paragraph you drafted in the worksheet.</a:t>
+            </a:r>
+          </a:p>
+        </p:txBody>
+      </p:sp>
+    </p:spTree>
+  </p:cSld>
+</p:sld>
+</file>
+
+<file path=ppt/slides/slide11.xml><?xml version="1.0" encoding="utf-8"?>
+<p:sld xmlns:a="http://schemas.openxmlformats.org/drawingml/2006/main" xmlns:r="http://schemas.openxmlformats.org/officeDocument/2006/relationships" xmlns:p="http://schemas.openxmlformats.org/presentationml/2006/main">
+  <p:cSld>
+    <p:spTree>
+      <p:nvGrpSpPr>
+        <p:cNvPr id="1" name=""/>
+        <p:cNvGrpSpPr/>
+        <p:nvPr/>
+      </p:nvGrpSpPr>
+      <p:grpSpPr>
+        <a:xfrm>
+          <a:off x="0" y="0"/>
+          <a:ext cx="0" cy="0"/>
+          <a:chOff x="0" y="0"/>
+          <a:chExt cx="0" cy="0"/>
+        </a:xfrm>
+      </p:grpSpPr>
+      <p:sp>
+        <p:nvSpPr>
+          <p:cNvPr id="2" name="Title 1"/>
+          <p:cNvSpPr>
+            <a:spLocks noGrp="1"/>
+          </p:cNvSpPr>
+          <p:nvPr>
+            <p:ph type="title"/>
+          </p:nvPr>
+        </p:nvSpPr>
+        <p:spPr>
+          <a:xfrm>
+            <a:off x="0" y="0"/>
+            <a:ext cx="9144000" cy="582780"/>
+          </a:xfrm>
+        </p:spPr>
+        <p:txBody>
+          <a:bodyPr/>
+          <a:lstStyle/>
+          <a:p>
+            <a:pPr lvl="0" indent="0" marL="0">
+              <a:buNone/>
+            </a:pPr>
+            <a:r>
+              <a:rPr/>
+              <a:t>References</a:t>
+            </a:r>
+          </a:p>
+        </p:txBody>
+      </p:sp>
+      <p:sp>
+        <p:nvSpPr>
+          <p:cNvPr id="3" name="Content Placeholder 2"/>
+          <p:cNvSpPr>
+            <a:spLocks noGrp="1"/>
+          </p:cNvSpPr>
+          <p:nvPr>
+            <p:ph idx="1"/>
+          </p:nvPr>
+        </p:nvSpPr>
+        <p:spPr/>
+        <p:txBody>
+          <a:bodyPr/>
+          <a:lstStyle/>
+          <a:p>
+            <a:pPr lvl="0"/>
+            <a:r>
+              <a:rPr/>
+              <a:t>Whitlock, M. &amp; Schluter, D. </a:t>
+            </a:r>
+            <a:r>
+              <a:rPr i="1"/>
+              <a:t>The Analysis of Biological Data</a:t>
+            </a:r>
+            <a:r>
+              <a:rPr/>
+              <a:t> (2nd ed.), Ch. 17.</a:t>
+            </a:r>
+          </a:p>
+          <a:p>
+            <a:pPr lvl="0"/>
+            <a:r>
+              <a:rPr/>
+              <a:t>Wickham, H. </a:t>
+            </a:r>
+            <a:r>
+              <a:rPr i="1"/>
+              <a:t>R for Data Science (2nd ed.)</a:t>
+            </a:r>
+            <a:r>
+              <a:rPr/>
+              <a:t> — </a:t>
+            </a:r>
+            <a:r>
+              <a:rPr>
+                <a:hlinkClick r:id="rId2"/>
+              </a:rPr>
+              <a:t>https://r4ds.hadley.nz/</a:t>
             </a:r>
           </a:p>
         </p:txBody>
@@ -3565,7 +3771,7 @@
             </a:r>
             <a:r>
               <a:rPr/>
-              <a:t>. We checked the four regression assumptions using a residuals-vs-fitted plot and a normal Q–Q plot with a Shapiro–Wilk test on the residuals. All work was done in R with the tidyverse; this report was written in Quarto so every number and figure below is computed directly from the data.</a:t>
+              <a:t>. We checked the four regression assumptions using base R’s diagnostic plots for a fitted model, with a Shapiro–Wilk test on the residuals as a formal companion. All work was done in R with the tidyverse; this report was written in Quarto so every number and figure below is computed directly from the data.</a:t>
             </a:r>
           </a:p>
         </p:txBody>
@@ -3622,185 +3828,719 @@
           </a:p>
         </p:txBody>
       </p:sp>
-      <mc:AlternateContent xmlns:mc="http://schemas.openxmlformats.org/markup-compatibility/2006">
-        <mc:Choice xmlns:a14="http://schemas.microsoft.com/office/drawing/2010/main" Requires="a14">
-          <p:sp>
-            <p:nvSpPr>
-              <p:cNvPr id="4" name="Text Placeholder 3"/>
-              <p:cNvSpPr>
-                <a:spLocks noGrp="1"/>
-              </p:cNvSpPr>
-              <p:nvPr>
-                <p:ph idx="2" sz="half" type="body"/>
-              </p:nvPr>
-            </p:nvSpPr>
-            <p:spPr/>
-            <p:txBody>
-              <a:bodyPr/>
-              <a:lstStyle/>
-              <a:p>
-                <a:pPr lvl="0" indent="0" marL="0">
-                  <a:buNone/>
-                </a:pPr>
-                <a:r>
-                  <a:rPr/>
-                  <a:t>Paper mass was an extremely strong predictor of paper area (linear regression: F(1, 116) = 7.849329^{5}, </a:t>
-                </a:r>
-                <a:r>
-                  <a:rPr i="1"/>
-                  <a:t>p</a:t>
-                </a:r>
-                <a:r>
-                  <a:rPr/>
-                  <a:t> &lt; 5^{-224}, R² = 0.9999). The calibration equation was:</a:t>
-                </a:r>
-              </a:p>
-              <a:p>
-                <a:pPr lvl="0" indent="0" marL="0">
-                  <a:buNone/>
-                </a:pPr>
-                <a14:m>
-                  <m:oMathPara xmlns:m="http://schemas.openxmlformats.org/officeDocument/2006/math">
-                    <m:oMathParaPr>
-                      <m:jc m:val="center"/>
-                    </m:oMathParaPr>
-                    <m:oMath>
-                      <m:acc>
-                        <m:accPr>
-                          <m:chr m:val="̂"/>
-                        </m:accPr>
-                        <m:e>
-                          <m:r>
-                            <m:rPr>
-                              <m:nor/>
-                              <m:sty m:val="p"/>
-                            </m:rPr>
-                            <m:t>area</m:t>
-                          </m:r>
-                        </m:e>
-                      </m:acc>
-                      <m:r>
-                        <m:rPr>
-                          <m:sty m:val="p"/>
-                        </m:rPr>
-                        <m:t>=</m:t>
-                      </m:r>
-                      <m:r>
-                        <m:t>130.52</m:t>
-                      </m:r>
-                      <m:r>
-                        <m:rPr>
-                          <m:sty m:val="p"/>
-                        </m:rPr>
-                        <m:t>×</m:t>
-                      </m:r>
-                      <m:r>
-                        <m:rPr>
-                          <m:nor/>
-                          <m:sty m:val="p"/>
-                        </m:rPr>
-                        <m:t>mass</m:t>
-                      </m:r>
-                      <m:r>
-                        <m:rPr>
-                          <m:sty m:val="p"/>
-                        </m:rPr>
-                        <m:t>+</m:t>
-                      </m:r>
-                      <m:r>
-                        <m:t>0.279</m:t>
-                      </m:r>
-                    </m:oMath>
-                  </m:oMathPara>
-                </a14:m>
-              </a:p>
-              <a:p>
-                <a:pPr lvl="0" indent="0" marL="0">
-                  <a:buNone/>
-                </a:pPr>
-                <a:r>
-                  <a:rPr/>
-                  <a:t>In words, every additional gram of paper corresponds to about </a:t>
-                </a:r>
-                <a:r>
-                  <a:rPr b="1"/>
-                  <a:t>130.5 cm²</a:t>
-                </a:r>
-                <a:r>
-                  <a:rPr/>
-                  <a:t> of area.</a:t>
-                </a:r>
-              </a:p>
-              <a:p>
-                <a:pPr lvl="0" indent="0" marL="1270000">
-                  <a:buNone/>
-                </a:pPr>
-                <a:r>
-                  <a:rPr sz="2000" b="1"/>
-                  <a:t>Note</a:t>
-                </a:r>
-              </a:p>
-              <a:p>
-                <a:pPr lvl="0" indent="0" marL="1270000">
-                  <a:buNone/>
-                </a:pPr>
-                <a:r>
-                  <a:rPr sz="2000"/>
-                  <a:t>Notice that </a:t>
-                </a:r>
-                <a:r>
-                  <a:rPr sz="2000" b="1"/>
-                  <a:t>F, </a:t>
-                </a:r>
-                <a:r>
-                  <a:rPr sz="2000" b="1" i="1"/>
-                  <a:t>p</a:t>
-                </a:r>
-                <a:r>
-                  <a:rPr sz="2000" b="1"/>
-                  <a:t>, R², the slope, and the intercept above were never typed by hand</a:t>
-                </a:r>
-                <a:r>
-                  <a:rPr sz="2000"/>
-                  <a:t> — they are inserted with inline code like </a:t>
-                </a:r>
-                <a:r>
-                  <a:rPr sz="2000">
-                    <a:latin typeface="Courier"/>
-                  </a:rPr>
-                  <a:t>130.52</a:t>
-                </a:r>
-                <a:r>
-                  <a:rPr sz="2000"/>
-                  <a:t>. Change the data file and re-render, and every one of these updates itself. That is the difference from the </a:t>
-                </a:r>
-                <a:r>
-                  <a:rPr sz="2000">
-                    <a:latin typeface="Courier"/>
-                  </a:rPr>
-                  <a:t>.R</a:t>
-                </a:r>
-                <a:r>
-                  <a:rPr sz="2000"/>
-                  <a:t> script, where you would copy each number into Word yourself.</a:t>
-                </a:r>
-              </a:p>
-              <a:p>
-                <a:pPr lvl="0" indent="0" marL="0">
-                  <a:spcBef>
-                    <a:spcPts val="3000"/>
-                  </a:spcBef>
-                  <a:buNone/>
-                </a:pPr>
-                <a:r>
-                  <a:rPr b="1"/>
-                  <a:t>The calibration curve</a:t>
-                </a:r>
-              </a:p>
-            </p:txBody>
-          </p:sp>
-        </mc:Choice>
-      </mc:AlternateContent>
+      <p:sp>
+        <p:nvSpPr>
+          <p:cNvPr id="4" name="Text Placeholder 3"/>
+          <p:cNvSpPr>
+            <a:spLocks noGrp="1"/>
+          </p:cNvSpPr>
+          <p:nvPr>
+            <p:ph idx="2" sz="half" type="body"/>
+          </p:nvPr>
+        </p:nvSpPr>
+        <p:spPr/>
+        <p:txBody>
+          <a:bodyPr/>
+          <a:lstStyle/>
+          <a:p>
+            <a:pPr lvl="0" indent="0" marL="0">
+              <a:buNone/>
+            </a:pPr>
+            <a:r>
+              <a:rPr/>
+              <a:t>Paper mass was an extremely strong predictor of paper area. The overall model fit, coefficients, and </a:t>
+            </a:r>
+            <a:r>
+              <a:rPr i="1"/>
+              <a:t>p</a:t>
+            </a:r>
+            <a:r>
+              <a:rPr/>
+              <a:t>-values are shown in the two tables below.</a:t>
+            </a:r>
+          </a:p>
+        </p:txBody>
+      </p:sp>
+      <p:graphicFrame>
+        <p:nvGraphicFramePr>
+          <p:cNvPr id="6" name="Content Placeholder 5"/>
+          <p:cNvGraphicFramePr>
+            <a:graphicFrameLocks noGrp="1"/>
+          </p:cNvGraphicFramePr>
+          <p:nvPr>
+            <p:ph idx="1"/>
+          </p:nvPr>
+        </p:nvGraphicFramePr>
+        <p:xfrm>
+          <a:off x="127000" y="2819400"/>
+          <a:ext cx="8750300" cy="1435100"/>
+        </p:xfrm>
+        <a:graphic>
+          <a:graphicData uri="http://schemas.openxmlformats.org/drawingml/2006/table">
+            <a:tbl>
+              <a:tblPr firstRow="1" bandRow="1">
+                <a:tableStyleId>{5C22544A-7EE6-4342-B048-85BDC9FD1C3A}</a:tableStyleId>
+              </a:tblPr>
+              <a:tblGrid>
+                <a:gridCol w="1739900"/>
+                <a:gridCol w="1739900"/>
+                <a:gridCol w="1739900"/>
+                <a:gridCol w="1739900"/>
+                <a:gridCol w="1739900"/>
+              </a:tblGrid>
+              <a:tr h="0">
+                <a:tc>
+                  <a:txBody>
+                    <a:bodyPr/>
+                    <a:lstStyle/>
+                    <a:p>
+                      <a:pPr lvl="0" indent="0" marL="0" algn="r">
+                        <a:buNone/>
+                      </a:pPr>
+                      <a:r>
+                        <a:rPr/>
+                        <a:t>R-squared</a:t>
+                      </a:r>
+                    </a:p>
+                  </a:txBody>
+                  <a:tcPr/>
+                </a:tc>
+                <a:tc>
+                  <a:txBody>
+                    <a:bodyPr/>
+                    <a:lstStyle/>
+                    <a:p>
+                      <a:pPr lvl="0" indent="0" marL="0" algn="r">
+                        <a:buNone/>
+                      </a:pPr>
+                      <a:r>
+                        <a:rPr/>
+                        <a:t>F</a:t>
+                      </a:r>
+                    </a:p>
+                  </a:txBody>
+                  <a:tcPr/>
+                </a:tc>
+                <a:tc>
+                  <a:txBody>
+                    <a:bodyPr/>
+                    <a:lstStyle/>
+                    <a:p>
+                      <a:pPr lvl="0" indent="0" marL="0" algn="r">
+                        <a:buNone/>
+                      </a:pPr>
+                      <a:r>
+                        <a:rPr/>
+                        <a:t>df (model)</a:t>
+                      </a:r>
+                    </a:p>
+                  </a:txBody>
+                  <a:tcPr/>
+                </a:tc>
+                <a:tc>
+                  <a:txBody>
+                    <a:bodyPr/>
+                    <a:lstStyle/>
+                    <a:p>
+                      <a:pPr lvl="0" indent="0" marL="0" algn="r">
+                        <a:buNone/>
+                      </a:pPr>
+                      <a:r>
+                        <a:rPr/>
+                        <a:t>df (residual)</a:t>
+                      </a:r>
+                    </a:p>
+                  </a:txBody>
+                  <a:tcPr/>
+                </a:tc>
+                <a:tc>
+                  <a:txBody>
+                    <a:bodyPr/>
+                    <a:lstStyle/>
+                    <a:p>
+                      <a:pPr lvl="0" indent="0" marL="0" algn="r">
+                        <a:buNone/>
+                      </a:pPr>
+                      <a:r>
+                        <a:rPr/>
+                        <a:t>p-value</a:t>
+                      </a:r>
+                    </a:p>
+                  </a:txBody>
+                  <a:tcPr/>
+                </a:tc>
+              </a:tr>
+              <a:tr h="0">
+                <a:tc>
+                  <a:txBody>
+                    <a:bodyPr/>
+                    <a:lstStyle/>
+                    <a:p>
+                      <a:pPr lvl="0" indent="0" marL="0" algn="r">
+                        <a:buNone/>
+                      </a:pPr>
+                      <a:r>
+                        <a:rPr/>
+                        <a:t>0.9999</a:t>
+                      </a:r>
+                    </a:p>
+                  </a:txBody>
+                </a:tc>
+                <a:tc>
+                  <a:txBody>
+                    <a:bodyPr/>
+                    <a:lstStyle/>
+                    <a:p>
+                      <a:pPr lvl="0" indent="0" marL="0" algn="r">
+                        <a:buNone/>
+                      </a:pPr>
+                      <a:r>
+                        <a:rPr/>
+                        <a:t>784932.9</a:t>
+                      </a:r>
+                    </a:p>
+                  </a:txBody>
+                </a:tc>
+                <a:tc>
+                  <a:txBody>
+                    <a:bodyPr/>
+                    <a:lstStyle/>
+                    <a:p>
+                      <a:pPr lvl="0" indent="0" marL="0" algn="r">
+                        <a:buNone/>
+                      </a:pPr>
+                      <a:r>
+                        <a:rPr/>
+                        <a:t>1</a:t>
+                      </a:r>
+                    </a:p>
+                  </a:txBody>
+                </a:tc>
+                <a:tc>
+                  <a:txBody>
+                    <a:bodyPr/>
+                    <a:lstStyle/>
+                    <a:p>
+                      <a:pPr lvl="0" indent="0" marL="0" algn="r">
+                        <a:buNone/>
+                      </a:pPr>
+                      <a:r>
+                        <a:rPr/>
+                        <a:t>116</a:t>
+                      </a:r>
+                    </a:p>
+                  </a:txBody>
+                </a:tc>
+                <a:tc>
+                  <a:txBody>
+                    <a:bodyPr/>
+                    <a:lstStyle/>
+                    <a:p>
+                      <a:pPr lvl="0" indent="0" marL="0" algn="r">
+                        <a:buNone/>
+                      </a:pPr>
+                      <a:r>
+                        <a:rPr/>
+                        <a:t>0</a:t>
+                      </a:r>
+                    </a:p>
+                  </a:txBody>
+                </a:tc>
+              </a:tr>
+            </a:tbl>
+          </a:graphicData>
+        </a:graphic>
+      </p:graphicFrame>
+      <p:sp>
+        <p:nvSpPr>
+          <p:cNvPr id="1" name="TextBox 3"/>
+          <p:cNvSpPr txBox="1"/>
+          <p:nvPr>
+            <p:ph idx="1"/>
+          </p:nvPr>
+        </p:nvSpPr>
+        <p:spPr>
+          <a:xfrm>
+            <a:off x="127000" y="4254500"/>
+            <a:ext cx="8750300" cy="508000"/>
+          </a:xfrm>
+          <a:prstGeom prst="rect">
+            <a:avLst/>
+          </a:prstGeom>
+          <a:noFill/>
+        </p:spPr>
+        <p:txBody>
+          <a:bodyPr/>
+          <a:lstStyle/>
+          <a:p>
+            <a:pPr lvl="0" indent="0" marL="0" algn="ctr">
+              <a:buNone/>
+            </a:pPr>
+            <a:r>
+              <a:rPr/>
+              <a:t>Table 1. Overall fit of the calibration regression.</a:t>
+            </a:r>
+          </a:p>
+        </p:txBody>
+      </p:sp>
+    </p:spTree>
+  </p:cSld>
+</p:sld>
+</file>
+
+<file path=ppt/slides/slide5.xml><?xml version="1.0" encoding="utf-8"?>
+<p:sld xmlns:a="http://schemas.openxmlformats.org/drawingml/2006/main" xmlns:r="http://schemas.openxmlformats.org/officeDocument/2006/relationships" xmlns:p="http://schemas.openxmlformats.org/presentationml/2006/main">
+  <p:cSld>
+    <p:spTree>
+      <p:nvGrpSpPr>
+        <p:cNvPr id="1" name=""/>
+        <p:cNvGrpSpPr/>
+        <p:nvPr/>
+      </p:nvGrpSpPr>
+      <p:grpSpPr>
+        <a:xfrm>
+          <a:off x="0" y="0"/>
+          <a:ext cx="0" cy="0"/>
+          <a:chOff x="0" y="0"/>
+          <a:chExt cx="0" cy="0"/>
+        </a:xfrm>
+      </p:grpSpPr>
+      <p:graphicFrame>
+        <p:nvGraphicFramePr>
+          <p:cNvPr id="6" name="Content Placeholder 5"/>
+          <p:cNvGraphicFramePr>
+            <a:graphicFrameLocks noGrp="1"/>
+          </p:cNvGraphicFramePr>
+          <p:nvPr>
+            <p:ph idx="1"/>
+          </p:nvPr>
+        </p:nvGraphicFramePr>
+        <p:xfrm>
+          <a:off x="0" y="609600"/>
+          <a:ext cx="9080500" cy="3403600"/>
+        </p:xfrm>
+        <a:graphic>
+          <a:graphicData uri="http://schemas.openxmlformats.org/drawingml/2006/table">
+            <a:tbl>
+              <a:tblPr firstRow="1" bandRow="1">
+                <a:tableStyleId>{5C22544A-7EE6-4342-B048-85BDC9FD1C3A}</a:tableStyleId>
+              </a:tblPr>
+              <a:tblGrid>
+                <a:gridCol w="1816100"/>
+                <a:gridCol w="1816100"/>
+                <a:gridCol w="1816100"/>
+                <a:gridCol w="1816100"/>
+                <a:gridCol w="1816100"/>
+              </a:tblGrid>
+              <a:tr h="0">
+                <a:tc>
+                  <a:txBody>
+                    <a:bodyPr/>
+                    <a:lstStyle/>
+                    <a:p>
+                      <a:pPr lvl="0" indent="0" marL="0" algn="l">
+                        <a:buNone/>
+                      </a:pPr>
+                      <a:r>
+                        <a:rPr/>
+                        <a:t>Term</a:t>
+                      </a:r>
+                    </a:p>
+                  </a:txBody>
+                  <a:tcPr/>
+                </a:tc>
+                <a:tc>
+                  <a:txBody>
+                    <a:bodyPr/>
+                    <a:lstStyle/>
+                    <a:p>
+                      <a:pPr lvl="0" indent="0" marL="0" algn="r">
+                        <a:buNone/>
+                      </a:pPr>
+                      <a:r>
+                        <a:rPr/>
+                        <a:t>Estimate</a:t>
+                      </a:r>
+                    </a:p>
+                  </a:txBody>
+                  <a:tcPr/>
+                </a:tc>
+                <a:tc>
+                  <a:txBody>
+                    <a:bodyPr/>
+                    <a:lstStyle/>
+                    <a:p>
+                      <a:pPr lvl="0" indent="0" marL="0" algn="r">
+                        <a:buNone/>
+                      </a:pPr>
+                      <a:r>
+                        <a:rPr/>
+                        <a:t>Std. error</a:t>
+                      </a:r>
+                    </a:p>
+                  </a:txBody>
+                  <a:tcPr/>
+                </a:tc>
+                <a:tc>
+                  <a:txBody>
+                    <a:bodyPr/>
+                    <a:lstStyle/>
+                    <a:p>
+                      <a:pPr lvl="0" indent="0" marL="0" algn="r">
+                        <a:buNone/>
+                      </a:pPr>
+                      <a:r>
+                        <a:rPr/>
+                        <a:t>t</a:t>
+                      </a:r>
+                    </a:p>
+                  </a:txBody>
+                  <a:tcPr/>
+                </a:tc>
+                <a:tc>
+                  <a:txBody>
+                    <a:bodyPr/>
+                    <a:lstStyle/>
+                    <a:p>
+                      <a:pPr lvl="0" indent="0" marL="0" algn="r">
+                        <a:buNone/>
+                      </a:pPr>
+                      <a:r>
+                        <a:rPr/>
+                        <a:t>p-value</a:t>
+                      </a:r>
+                    </a:p>
+                  </a:txBody>
+                  <a:tcPr/>
+                </a:tc>
+              </a:tr>
+              <a:tr h="0">
+                <a:tc>
+                  <a:txBody>
+                    <a:bodyPr/>
+                    <a:lstStyle/>
+                    <a:p>
+                      <a:pPr lvl="0" indent="0" marL="0" algn="l">
+                        <a:buNone/>
+                      </a:pPr>
+                      <a:r>
+                        <a:rPr/>
+                        <a:t>(Intercept)</a:t>
+                      </a:r>
+                    </a:p>
+                  </a:txBody>
+                </a:tc>
+                <a:tc>
+                  <a:txBody>
+                    <a:bodyPr/>
+                    <a:lstStyle/>
+                    <a:p>
+                      <a:pPr lvl="0" indent="0" marL="0" algn="r">
+                        <a:buNone/>
+                      </a:pPr>
+                      <a:r>
+                        <a:rPr/>
+                        <a:t>0.279</a:t>
+                      </a:r>
+                    </a:p>
+                  </a:txBody>
+                </a:tc>
+                <a:tc>
+                  <a:txBody>
+                    <a:bodyPr/>
+                    <a:lstStyle/>
+                    <a:p>
+                      <a:pPr lvl="0" indent="0" marL="0" algn="r">
+                        <a:buNone/>
+                      </a:pPr>
+                      <a:r>
+                        <a:rPr/>
+                        <a:t>0.181</a:t>
+                      </a:r>
+                    </a:p>
+                  </a:txBody>
+                </a:tc>
+                <a:tc>
+                  <a:txBody>
+                    <a:bodyPr/>
+                    <a:lstStyle/>
+                    <a:p>
+                      <a:pPr lvl="0" indent="0" marL="0" algn="r">
+                        <a:buNone/>
+                      </a:pPr>
+                      <a:r>
+                        <a:rPr/>
+                        <a:t>1.5</a:t>
+                      </a:r>
+                    </a:p>
+                  </a:txBody>
+                </a:tc>
+                <a:tc>
+                  <a:txBody>
+                    <a:bodyPr/>
+                    <a:lstStyle/>
+                    <a:p>
+                      <a:pPr lvl="0" indent="0" marL="0" algn="r">
+                        <a:buNone/>
+                      </a:pPr>
+                      <a:r>
+                        <a:rPr/>
+                        <a:t>0.1261386</a:t>
+                      </a:r>
+                    </a:p>
+                  </a:txBody>
+                </a:tc>
+              </a:tr>
+              <a:tr h="0">
+                <a:tc>
+                  <a:txBody>
+                    <a:bodyPr/>
+                    <a:lstStyle/>
+                    <a:p>
+                      <a:pPr lvl="0" indent="0" marL="0" algn="l">
+                        <a:buNone/>
+                      </a:pPr>
+                      <a:r>
+                        <a:rPr/>
+                        <a:t>mass_g</a:t>
+                      </a:r>
+                    </a:p>
+                  </a:txBody>
+                </a:tc>
+                <a:tc>
+                  <a:txBody>
+                    <a:bodyPr/>
+                    <a:lstStyle/>
+                    <a:p>
+                      <a:pPr lvl="0" indent="0" marL="0" algn="r">
+                        <a:buNone/>
+                      </a:pPr>
+                      <a:r>
+                        <a:rPr/>
+                        <a:t>130.523</a:t>
+                      </a:r>
+                    </a:p>
+                  </a:txBody>
+                </a:tc>
+                <a:tc>
+                  <a:txBody>
+                    <a:bodyPr/>
+                    <a:lstStyle/>
+                    <a:p>
+                      <a:pPr lvl="0" indent="0" marL="0" algn="r">
+                        <a:buNone/>
+                      </a:pPr>
+                      <a:r>
+                        <a:rPr/>
+                        <a:t>0.147</a:t>
+                      </a:r>
+                    </a:p>
+                  </a:txBody>
+                </a:tc>
+                <a:tc>
+                  <a:txBody>
+                    <a:bodyPr/>
+                    <a:lstStyle/>
+                    <a:p>
+                      <a:pPr lvl="0" indent="0" marL="0" algn="r">
+                        <a:buNone/>
+                      </a:pPr>
+                      <a:r>
+                        <a:rPr/>
+                        <a:t>886.0</a:t>
+                      </a:r>
+                    </a:p>
+                  </a:txBody>
+                </a:tc>
+                <a:tc>
+                  <a:txBody>
+                    <a:bodyPr/>
+                    <a:lstStyle/>
+                    <a:p>
+                      <a:pPr lvl="0" indent="0" marL="0" algn="r">
+                        <a:buNone/>
+                      </a:pPr>
+                      <a:r>
+                        <a:rPr/>
+                        <a:t>0.0000000</a:t>
+                      </a:r>
+                    </a:p>
+                  </a:txBody>
+                </a:tc>
+              </a:tr>
+            </a:tbl>
+          </a:graphicData>
+        </a:graphic>
+      </p:graphicFrame>
+      <p:sp>
+        <p:nvSpPr>
+          <p:cNvPr id="1" name="TextBox 3"/>
+          <p:cNvSpPr txBox="1"/>
+          <p:nvPr>
+            <p:ph idx="1"/>
+          </p:nvPr>
+        </p:nvSpPr>
+        <p:spPr>
+          <a:xfrm>
+            <a:off x="0" y="4013200"/>
+            <a:ext cx="9080500" cy="508000"/>
+          </a:xfrm>
+          <a:prstGeom prst="rect">
+            <a:avLst/>
+          </a:prstGeom>
+          <a:noFill/>
+        </p:spPr>
+        <p:txBody>
+          <a:bodyPr/>
+          <a:lstStyle/>
+          <a:p>
+            <a:pPr lvl="0" indent="0" marL="0" algn="ctr">
+              <a:buNone/>
+            </a:pPr>
+            <a:r>
+              <a:rPr/>
+              <a:t>Table 2. Calibration equation coefficients. The </a:t>
+            </a:r>
+            <a:r>
+              <a:rPr>
+                <a:latin typeface="Courier"/>
+              </a:rPr>
+              <a:t>mass_g</a:t>
+            </a:r>
+            <a:r>
+              <a:rPr/>
+              <a:t> estimate is the area gained per additional gram of paper; </a:t>
+            </a:r>
+            <a:r>
+              <a:rPr>
+                <a:latin typeface="Courier"/>
+              </a:rPr>
+              <a:t>(Intercept)</a:t>
+            </a:r>
+            <a:r>
+              <a:rPr/>
+              <a:t> is the fitted area at zero mass.</a:t>
+            </a:r>
+          </a:p>
+        </p:txBody>
+      </p:sp>
+    </p:spTree>
+  </p:cSld>
+</p:sld>
+</file>
+
+<file path=ppt/slides/slide6.xml><?xml version="1.0" encoding="utf-8"?>
+<p:sld xmlns:a="http://schemas.openxmlformats.org/drawingml/2006/main" xmlns:r="http://schemas.openxmlformats.org/officeDocument/2006/relationships" xmlns:p="http://schemas.openxmlformats.org/presentationml/2006/main">
+  <p:cSld>
+    <p:spTree>
+      <p:nvGrpSpPr>
+        <p:cNvPr id="1" name=""/>
+        <p:cNvGrpSpPr/>
+        <p:nvPr/>
+      </p:nvGrpSpPr>
+      <p:grpSpPr>
+        <a:xfrm>
+          <a:off x="0" y="0"/>
+          <a:ext cx="0" cy="0"/>
+          <a:chOff x="0" y="0"/>
+          <a:chExt cx="0" cy="0"/>
+        </a:xfrm>
+      </p:grpSpPr>
+      <p:sp>
+        <p:nvSpPr>
+          <p:cNvPr id="4" name="Text Placeholder 3"/>
+          <p:cNvSpPr>
+            <a:spLocks noGrp="1"/>
+          </p:cNvSpPr>
+          <p:nvPr>
+            <p:ph idx="2" sz="half" type="body"/>
+          </p:nvPr>
+        </p:nvSpPr>
+        <p:spPr/>
+        <p:txBody>
+          <a:bodyPr/>
+          <a:lstStyle/>
+          <a:p>
+            <a:pPr lvl="0" indent="0" marL="0">
+              <a:buNone/>
+            </a:pPr>
+            <a:r>
+              <a:rPr/>
+              <a:t>Read the calibration equation off Table 2: predicted area equals the </a:t>
+            </a:r>
+            <a:r>
+              <a:rPr>
+                <a:latin typeface="Courier"/>
+              </a:rPr>
+              <a:t>(Intercept)</a:t>
+            </a:r>
+            <a:r>
+              <a:rPr/>
+              <a:t> estimate plus the </a:t>
+            </a:r>
+            <a:r>
+              <a:rPr>
+                <a:latin typeface="Courier"/>
+              </a:rPr>
+              <a:t>mass_g</a:t>
+            </a:r>
+            <a:r>
+              <a:rPr/>
+              <a:t> estimate times paper mass. In words, every additional gram of paper corresponds to about the </a:t>
+            </a:r>
+            <a:r>
+              <a:rPr>
+                <a:latin typeface="Courier"/>
+              </a:rPr>
+              <a:t>mass_g</a:t>
+            </a:r>
+            <a:r>
+              <a:rPr/>
+              <a:t> estimate in cm² of area.</a:t>
+            </a:r>
+          </a:p>
+          <a:p>
+            <a:pPr lvl="0" indent="0" marL="1270000">
+              <a:buNone/>
+            </a:pPr>
+            <a:r>
+              <a:rPr sz="2000" b="1"/>
+              <a:t>Note</a:t>
+            </a:r>
+          </a:p>
+          <a:p>
+            <a:pPr lvl="0" indent="0" marL="1270000">
+              <a:buNone/>
+            </a:pPr>
+            <a:r>
+              <a:rPr sz="2000"/>
+              <a:t>Every number in Tables 1 and 2 is computed from the data when the document renders — nothing was typed by hand. Change the data file and re-render, and the tables update themselves. That is the difference from the </a:t>
+            </a:r>
+            <a:r>
+              <a:rPr sz="2000">
+                <a:latin typeface="Courier"/>
+              </a:rPr>
+              <a:t>.R</a:t>
+            </a:r>
+            <a:r>
+              <a:rPr sz="2000"/>
+              <a:t> script, where you would copy each number into Word yourself.</a:t>
+            </a:r>
+          </a:p>
+          <a:p>
+            <a:pPr lvl="0" indent="0" marL="0">
+              <a:spcBef>
+                <a:spcPts val="3000"/>
+              </a:spcBef>
+              <a:buNone/>
+            </a:pPr>
+            <a:r>
+              <a:rPr b="1"/>
+              <a:t>The calibration curve</a:t>
+            </a:r>
+          </a:p>
+        </p:txBody>
+      </p:sp>
       <p:pic>
         <p:nvPicPr>
           <p:cNvPr descr="regression_analysis_report_files/figure-pptx/calibration-plot-1.png" id="0" name="Picture 1"/>
@@ -3893,7 +4633,7 @@
       </p:sp>
       <p:pic>
         <p:nvPicPr>
-          <p:cNvPr descr="regression_analysis_report_files/figure-pptx/resid-plot-1.png" id="0" name="Picture 1"/>
+          <p:cNvPr descr="regression_analysis_report_files/figure-pptx/diagnostic-plots-1.png" id="0" name="Picture 1"/>
           <p:cNvPicPr>
             <a:picLocks noGrp="1" noChangeAspect="1"/>
           </p:cNvPicPr>
@@ -3948,77 +4688,7 @@
             </a:pPr>
             <a:r>
               <a:rPr/>
-              <a:t>Figure 2. Residuals vs. fitted values — a random band with no funnel or curve supports linearity and equal variance.</a:t>
-            </a:r>
-          </a:p>
-        </p:txBody>
-      </p:sp>
-      <p:sp>
-        <p:nvSpPr>
-          <p:cNvPr id="3" name="Content Placeholder 2"/>
-          <p:cNvSpPr>
-            <a:spLocks noGrp="1"/>
-          </p:cNvSpPr>
-          <p:nvPr>
-            <p:ph idx="1"/>
-          </p:nvPr>
-        </p:nvSpPr>
-        <p:spPr/>
-        <p:txBody>
-          <a:bodyPr/>
-          <a:lstStyle/>
-          <a:p>
-            <a:pPr lvl="0" indent="0" marL="0">
-              <a:buNone/>
-            </a:pPr>
-            <a:r>
-              <a:rPr/>
-              <a:t>A Shapiro–Wilk test on the residuals gave W = 0.677, </a:t>
-            </a:r>
-            <a:r>
-              <a:rPr i="1"/>
-              <a:t>p</a:t>
-            </a:r>
-            <a:r>
-              <a:rPr/>
-              <a:t> = 9.4^{-15}.</a:t>
-            </a:r>
-          </a:p>
-          <a:p>
-            <a:pPr lvl="0" indent="0" marL="0">
-              <a:spcBef>
-                <a:spcPts val="3000"/>
-              </a:spcBef>
-              <a:buNone/>
-            </a:pPr>
-            <a:r>
-              <a:rPr b="1"/>
-              <a:t>Predicting leaf area</a:t>
-            </a:r>
-          </a:p>
-          <a:p>
-            <a:pPr lvl="0" indent="0" marL="0">
-              <a:buNone/>
-            </a:pPr>
-            <a:r>
-              <a:rPr/>
-              <a:t>Applying the equation to two example tracings, a sunny-side tracing of 0.092 g predicts an area of </a:t>
-            </a:r>
-            <a:r>
-              <a:rPr b="1"/>
-              <a:t>12.3 cm²</a:t>
-            </a:r>
-            <a:r>
-              <a:rPr/>
-              <a:t>, while a heavier shady-side tracing of 0.138 g predicts </a:t>
-            </a:r>
-            <a:r>
-              <a:rPr b="1"/>
-              <a:t>18.3 cm²</a:t>
-            </a:r>
-            <a:r>
-              <a:rPr/>
-              <a:t> — consistent with our earlier finding that shady leaves are larger.</a:t>
+              <a:t>Figure 2. Base R diagnostic plots for the fitted model — residuals vs. fitted, normal Q-Q, scale-location, and residuals vs. leverage. A random band with no funnel or curve in panel 1 supports linearity and equal variance.</a:t>
             </a:r>
           </a:p>
         </p:txBody>
@@ -4028,7 +4698,7 @@
 </p:sld>
 </file>
 
-<file path=ppt/slides/slide5.xml><?xml version="1.0" encoding="utf-8"?>
+<file path=ppt/slides/slide7.xml><?xml version="1.0" encoding="utf-8"?>
 <p:sld xmlns:a="http://schemas.openxmlformats.org/drawingml/2006/main" xmlns:r="http://schemas.openxmlformats.org/officeDocument/2006/relationships" xmlns:p="http://schemas.openxmlformats.org/presentationml/2006/main">
   <p:cSld>
     <p:spTree>
@@ -4045,77 +4715,160 @@
           <a:chExt cx="0" cy="0"/>
         </a:xfrm>
       </p:grpSpPr>
-      <p:sp>
-        <p:nvSpPr>
-          <p:cNvPr id="2" name="Title 1"/>
-          <p:cNvSpPr>
-            <a:spLocks noGrp="1"/>
-          </p:cNvSpPr>
-          <p:nvPr>
-            <p:ph type="title"/>
+      <p:graphicFrame>
+        <p:nvGraphicFramePr>
+          <p:cNvPr id="6" name="Content Placeholder 5"/>
+          <p:cNvGraphicFramePr>
+            <a:graphicFrameLocks noGrp="1"/>
+          </p:cNvGraphicFramePr>
+          <p:nvPr>
+            <p:ph idx="1"/>
+          </p:nvPr>
+        </p:nvGraphicFramePr>
+        <p:xfrm>
+          <a:off x="0" y="609600"/>
+          <a:ext cx="9080500" cy="3403600"/>
+        </p:xfrm>
+        <a:graphic>
+          <a:graphicData uri="http://schemas.openxmlformats.org/drawingml/2006/table">
+            <a:tbl>
+              <a:tblPr firstRow="1" bandRow="1">
+                <a:tableStyleId>{5C22544A-7EE6-4342-B048-85BDC9FD1C3A}</a:tableStyleId>
+              </a:tblPr>
+              <a:tblGrid>
+                <a:gridCol w="3022600"/>
+                <a:gridCol w="3022600"/>
+                <a:gridCol w="3022600"/>
+              </a:tblGrid>
+              <a:tr h="0">
+                <a:tc>
+                  <a:txBody>
+                    <a:bodyPr/>
+                    <a:lstStyle/>
+                    <a:p>
+                      <a:pPr lvl="0" indent="0" marL="0" algn="r">
+                        <a:buNone/>
+                      </a:pPr>
+                      <a:r>
+                        <a:rPr/>
+                        <a:t>W</a:t>
+                      </a:r>
+                    </a:p>
+                  </a:txBody>
+                  <a:tcPr/>
+                </a:tc>
+                <a:tc>
+                  <a:txBody>
+                    <a:bodyPr/>
+                    <a:lstStyle/>
+                    <a:p>
+                      <a:pPr lvl="0" indent="0" marL="0" algn="r">
+                        <a:buNone/>
+                      </a:pPr>
+                      <a:r>
+                        <a:rPr/>
+                        <a:t>p-value</a:t>
+                      </a:r>
+                    </a:p>
+                  </a:txBody>
+                  <a:tcPr/>
+                </a:tc>
+                <a:tc>
+                  <a:txBody>
+                    <a:bodyPr/>
+                    <a:lstStyle/>
+                    <a:p>
+                      <a:pPr lvl="0" indent="0" marL="0" algn="l">
+                        <a:buNone/>
+                      </a:pPr>
+                      <a:r>
+                        <a:rPr/>
+                        <a:t>Method</a:t>
+                      </a:r>
+                    </a:p>
+                  </a:txBody>
+                  <a:tcPr/>
+                </a:tc>
+              </a:tr>
+              <a:tr h="0">
+                <a:tc>
+                  <a:txBody>
+                    <a:bodyPr/>
+                    <a:lstStyle/>
+                    <a:p>
+                      <a:pPr lvl="0" indent="0" marL="0" algn="r">
+                        <a:buNone/>
+                      </a:pPr>
+                      <a:r>
+                        <a:rPr/>
+                        <a:t>0.677</a:t>
+                      </a:r>
+                    </a:p>
+                  </a:txBody>
+                </a:tc>
+                <a:tc>
+                  <a:txBody>
+                    <a:bodyPr/>
+                    <a:lstStyle/>
+                    <a:p>
+                      <a:pPr lvl="0" indent="0" marL="0" algn="r">
+                        <a:buNone/>
+                      </a:pPr>
+                      <a:r>
+                        <a:rPr/>
+                        <a:t>9.42496e-15</a:t>
+                      </a:r>
+                    </a:p>
+                  </a:txBody>
+                </a:tc>
+                <a:tc>
+                  <a:txBody>
+                    <a:bodyPr/>
+                    <a:lstStyle/>
+                    <a:p>
+                      <a:pPr lvl="0" indent="0" marL="0" algn="l">
+                        <a:buNone/>
+                      </a:pPr>
+                      <a:r>
+                        <a:rPr/>
+                        <a:t>Shapiro-Wilk normality test</a:t>
+                      </a:r>
+                    </a:p>
+                  </a:txBody>
+                </a:tc>
+              </a:tr>
+            </a:tbl>
+          </a:graphicData>
+        </a:graphic>
+      </p:graphicFrame>
+      <p:sp>
+        <p:nvSpPr>
+          <p:cNvPr id="1" name="TextBox 3"/>
+          <p:cNvSpPr txBox="1"/>
+          <p:nvPr>
+            <p:ph idx="1"/>
           </p:nvPr>
         </p:nvSpPr>
         <p:spPr>
           <a:xfrm>
-            <a:off x="0" y="0"/>
-            <a:ext cx="9144000" cy="582780"/>
+            <a:off x="0" y="4013200"/>
+            <a:ext cx="9080500" cy="508000"/>
           </a:xfrm>
+          <a:prstGeom prst="rect">
+            <a:avLst/>
+          </a:prstGeom>
+          <a:noFill/>
         </p:spPr>
         <p:txBody>
           <a:bodyPr/>
           <a:lstStyle/>
           <a:p>
-            <a:pPr lvl="0" indent="0" marL="0">
+            <a:pPr lvl="0" indent="0" marL="0" algn="ctr">
               <a:buNone/>
             </a:pPr>
             <a:r>
               <a:rPr/>
-              <a:t>Discussion</a:t>
-            </a:r>
-          </a:p>
-        </p:txBody>
-      </p:sp>
-      <p:sp>
-        <p:nvSpPr>
-          <p:cNvPr id="3" name="Content Placeholder 2"/>
-          <p:cNvSpPr>
-            <a:spLocks noGrp="1"/>
-          </p:cNvSpPr>
-          <p:nvPr>
-            <p:ph idx="1"/>
-          </p:nvPr>
-        </p:nvSpPr>
-        <p:spPr/>
-        <p:txBody>
-          <a:bodyPr/>
-          <a:lstStyle/>
-          <a:p>
-            <a:pPr lvl="0" indent="0" marL="0">
-              <a:buNone/>
-            </a:pPr>
-            <a:r>
-              <a:rPr i="1"/>
-              <a:t>Write one short paragraph here.</a:t>
-            </a:r>
-            <a:r>
-              <a:rPr/>
-              <a:t> Did the calibration fit well (look at R² and Figure 1)? Did the residual plot and Shapiro–Wilk support the assumptions? Why is working in </a:t>
-            </a:r>
-            <a:r>
-              <a:rPr b="1"/>
-              <a:t>area</a:t>
-            </a:r>
-            <a:r>
-              <a:rPr/>
-              <a:t> (cm²) more biologically meaningful than raw </a:t>
-            </a:r>
-            <a:r>
-              <a:rPr b="1"/>
-              <a:t>mass</a:t>
-            </a:r>
-            <a:r>
-              <a:rPr/>
-              <a:t> (g) when comparing sunny and shady leaves? This is where you paste the results paragraph you drafted in the worksheet.</a:t>
+              <a:t>Table 3. Shapiro–Wilk normality test on the regression residuals.</a:t>
             </a:r>
           </a:p>
         </p:txBody>
@@ -4125,7 +4878,7 @@
 </p:sld>
 </file>
 
-<file path=ppt/slides/slide6.xml><?xml version="1.0" encoding="utf-8"?>
+<file path=ppt/slides/slide8.xml><?xml version="1.0" encoding="utf-8"?>
 <p:sld xmlns:a="http://schemas.openxmlformats.org/drawingml/2006/main" xmlns:r="http://schemas.openxmlformats.org/officeDocument/2006/relationships" xmlns:p="http://schemas.openxmlformats.org/presentationml/2006/main">
   <p:cSld>
     <p:spTree>
@@ -4144,82 +4897,305 @@
       </p:grpSpPr>
       <p:sp>
         <p:nvSpPr>
-          <p:cNvPr id="2" name="Title 1"/>
-          <p:cNvSpPr>
-            <a:spLocks noGrp="1"/>
-          </p:cNvSpPr>
-          <p:nvPr>
-            <p:ph type="title"/>
+          <p:cNvPr id="4" name="Text Placeholder 3"/>
+          <p:cNvSpPr>
+            <a:spLocks noGrp="1"/>
+          </p:cNvSpPr>
+          <p:nvPr>
+            <p:ph idx="2" sz="half" type="body"/>
+          </p:nvPr>
+        </p:nvSpPr>
+        <p:spPr/>
+        <p:txBody>
+          <a:bodyPr/>
+          <a:lstStyle/>
+          <a:p>
+            <a:pPr lvl="0" indent="0" marL="0">
+              <a:buNone/>
+            </a:pPr>
+            <a:r>
+              <a:rPr/>
+              <a:t>The Shapiro–Wilk result is in Table 3. Read </a:t>
+            </a:r>
+            <a:r>
+              <a:rPr i="1"/>
+              <a:t>W</a:t>
+            </a:r>
+            <a:r>
+              <a:rPr/>
+              <a:t> and its </a:t>
+            </a:r>
+            <a:r>
+              <a:rPr i="1"/>
+              <a:t>p</a:t>
+            </a:r>
+            <a:r>
+              <a:rPr/>
+              <a:t>-value there, then compare that verdict with the normal Q-Q panel of Figure 2.</a:t>
+            </a:r>
+          </a:p>
+          <a:p>
+            <a:pPr lvl="0" indent="0" marL="0">
+              <a:spcBef>
+                <a:spcPts val="3000"/>
+              </a:spcBef>
+              <a:buNone/>
+            </a:pPr>
+            <a:r>
+              <a:rPr b="1"/>
+              <a:t>Predicting leaf area</a:t>
+            </a:r>
+          </a:p>
+        </p:txBody>
+      </p:sp>
+      <p:graphicFrame>
+        <p:nvGraphicFramePr>
+          <p:cNvPr id="6" name="Content Placeholder 5"/>
+          <p:cNvGraphicFramePr>
+            <a:graphicFrameLocks noGrp="1"/>
+          </p:cNvGraphicFramePr>
+          <p:nvPr>
+            <p:ph idx="1"/>
+          </p:nvPr>
+        </p:nvGraphicFramePr>
+        <p:xfrm>
+          <a:off x="127000" y="2819400"/>
+          <a:ext cx="8750300" cy="1435100"/>
+        </p:xfrm>
+        <a:graphic>
+          <a:graphicData uri="http://schemas.openxmlformats.org/drawingml/2006/table">
+            <a:tbl>
+              <a:tblPr firstRow="1" bandRow="1">
+                <a:tableStyleId>{5C22544A-7EE6-4342-B048-85BDC9FD1C3A}</a:tableStyleId>
+              </a:tblPr>
+              <a:tblGrid>
+                <a:gridCol w="2908300"/>
+                <a:gridCol w="2908300"/>
+                <a:gridCol w="2908300"/>
+              </a:tblGrid>
+              <a:tr h="0">
+                <a:tc>
+                  <a:txBody>
+                    <a:bodyPr/>
+                    <a:lstStyle/>
+                    <a:p>
+                      <a:pPr lvl="0" indent="0" marL="0" algn="l">
+                        <a:buNone/>
+                      </a:pPr>
+                      <a:r>
+                        <a:rPr/>
+                        <a:t>Tracing</a:t>
+                      </a:r>
+                    </a:p>
+                  </a:txBody>
+                  <a:tcPr/>
+                </a:tc>
+                <a:tc>
+                  <a:txBody>
+                    <a:bodyPr/>
+                    <a:lstStyle/>
+                    <a:p>
+                      <a:pPr lvl="0" indent="0" marL="0" algn="r">
+                        <a:buNone/>
+                      </a:pPr>
+                      <a:r>
+                        <a:rPr/>
+                        <a:t>Mass (g)</a:t>
+                      </a:r>
+                    </a:p>
+                  </a:txBody>
+                  <a:tcPr/>
+                </a:tc>
+                <a:tc>
+                  <a:txBody>
+                    <a:bodyPr/>
+                    <a:lstStyle/>
+                    <a:p>
+                      <a:pPr lvl="0" indent="0" marL="0" algn="r">
+                        <a:buNone/>
+                      </a:pPr>
+                      <a:r>
+                        <a:rPr/>
+                        <a:t>Predicted area (cm²)</a:t>
+                      </a:r>
+                    </a:p>
+                  </a:txBody>
+                  <a:tcPr/>
+                </a:tc>
+              </a:tr>
+              <a:tr h="0">
+                <a:tc>
+                  <a:txBody>
+                    <a:bodyPr/>
+                    <a:lstStyle/>
+                    <a:p>
+                      <a:pPr lvl="0" indent="0" marL="0" algn="l">
+                        <a:buNone/>
+                      </a:pPr>
+                      <a:r>
+                        <a:rPr/>
+                        <a:t>sunny-side</a:t>
+                      </a:r>
+                    </a:p>
+                  </a:txBody>
+                </a:tc>
+                <a:tc>
+                  <a:txBody>
+                    <a:bodyPr/>
+                    <a:lstStyle/>
+                    <a:p>
+                      <a:pPr lvl="0" indent="0" marL="0" algn="r">
+                        <a:buNone/>
+                      </a:pPr>
+                      <a:r>
+                        <a:rPr/>
+                        <a:t>0.092</a:t>
+                      </a:r>
+                    </a:p>
+                  </a:txBody>
+                </a:tc>
+                <a:tc>
+                  <a:txBody>
+                    <a:bodyPr/>
+                    <a:lstStyle/>
+                    <a:p>
+                      <a:pPr lvl="0" indent="0" marL="0" algn="r">
+                        <a:buNone/>
+                      </a:pPr>
+                      <a:r>
+                        <a:rPr/>
+                        <a:t>12.3</a:t>
+                      </a:r>
+                    </a:p>
+                  </a:txBody>
+                </a:tc>
+              </a:tr>
+              <a:tr h="0">
+                <a:tc>
+                  <a:txBody>
+                    <a:bodyPr/>
+                    <a:lstStyle/>
+                    <a:p>
+                      <a:pPr lvl="0" indent="0" marL="0" algn="l">
+                        <a:buNone/>
+                      </a:pPr>
+                      <a:r>
+                        <a:rPr/>
+                        <a:t>shady-side</a:t>
+                      </a:r>
+                    </a:p>
+                  </a:txBody>
+                </a:tc>
+                <a:tc>
+                  <a:txBody>
+                    <a:bodyPr/>
+                    <a:lstStyle/>
+                    <a:p>
+                      <a:pPr lvl="0" indent="0" marL="0" algn="r">
+                        <a:buNone/>
+                      </a:pPr>
+                      <a:r>
+                        <a:rPr/>
+                        <a:t>0.138</a:t>
+                      </a:r>
+                    </a:p>
+                  </a:txBody>
+                </a:tc>
+                <a:tc>
+                  <a:txBody>
+                    <a:bodyPr/>
+                    <a:lstStyle/>
+                    <a:p>
+                      <a:pPr lvl="0" indent="0" marL="0" algn="r">
+                        <a:buNone/>
+                      </a:pPr>
+                      <a:r>
+                        <a:rPr/>
+                        <a:t>18.3</a:t>
+                      </a:r>
+                    </a:p>
+                  </a:txBody>
+                </a:tc>
+              </a:tr>
+            </a:tbl>
+          </a:graphicData>
+        </a:graphic>
+      </p:graphicFrame>
+      <p:sp>
+        <p:nvSpPr>
+          <p:cNvPr id="1" name="TextBox 3"/>
+          <p:cNvSpPr txBox="1"/>
+          <p:nvPr>
+            <p:ph idx="1"/>
           </p:nvPr>
         </p:nvSpPr>
         <p:spPr>
           <a:xfrm>
-            <a:off x="0" y="0"/>
-            <a:ext cx="9144000" cy="582780"/>
+            <a:off x="127000" y="4254500"/>
+            <a:ext cx="8750300" cy="508000"/>
           </a:xfrm>
+          <a:prstGeom prst="rect">
+            <a:avLst/>
+          </a:prstGeom>
+          <a:noFill/>
         </p:spPr>
         <p:txBody>
           <a:bodyPr/>
           <a:lstStyle/>
           <a:p>
+            <a:pPr lvl="0" indent="0" marL="0" algn="ctr">
+              <a:buNone/>
+            </a:pPr>
+            <a:r>
+              <a:rPr/>
+              <a:t>Table 4. Predicted leaf area for two example paper tracings, from the calibration equation.</a:t>
+            </a:r>
+          </a:p>
+        </p:txBody>
+      </p:sp>
+    </p:spTree>
+  </p:cSld>
+</p:sld>
+</file>
+
+<file path=ppt/slides/slide9.xml><?xml version="1.0" encoding="utf-8"?>
+<p:sld xmlns:a="http://schemas.openxmlformats.org/drawingml/2006/main" xmlns:r="http://schemas.openxmlformats.org/officeDocument/2006/relationships" xmlns:p="http://schemas.openxmlformats.org/presentationml/2006/main">
+  <p:cSld>
+    <p:spTree>
+      <p:nvGrpSpPr>
+        <p:cNvPr id="1" name=""/>
+        <p:cNvGrpSpPr/>
+        <p:nvPr/>
+      </p:nvGrpSpPr>
+      <p:grpSpPr>
+        <a:xfrm>
+          <a:off x="0" y="0"/>
+          <a:ext cx="0" cy="0"/>
+          <a:chOff x="0" y="0"/>
+          <a:chExt cx="0" cy="0"/>
+        </a:xfrm>
+      </p:grpSpPr>
+      <p:sp>
+        <p:nvSpPr>
+          <p:cNvPr id="3" name="Content Placeholder 2"/>
+          <p:cNvSpPr>
+            <a:spLocks noGrp="1"/>
+          </p:cNvSpPr>
+          <p:nvPr>
+            <p:ph idx="1"/>
+          </p:nvPr>
+        </p:nvSpPr>
+        <p:spPr/>
+        <p:txBody>
+          <a:bodyPr/>
+          <a:lstStyle/>
+          <a:p>
             <a:pPr lvl="0" indent="0" marL="0">
               <a:buNone/>
             </a:pPr>
             <a:r>
               <a:rPr/>
-              <a:t>References</a:t>
-            </a:r>
-          </a:p>
-        </p:txBody>
-      </p:sp>
-      <p:sp>
-        <p:nvSpPr>
-          <p:cNvPr id="3" name="Content Placeholder 2"/>
-          <p:cNvSpPr>
-            <a:spLocks noGrp="1"/>
-          </p:cNvSpPr>
-          <p:nvPr>
-            <p:ph idx="1"/>
-          </p:nvPr>
-        </p:nvSpPr>
-        <p:spPr/>
-        <p:txBody>
-          <a:bodyPr/>
-          <a:lstStyle/>
-          <a:p>
-            <a:pPr lvl="0"/>
-            <a:r>
-              <a:rPr/>
-              <a:t>Whitlock, M. &amp; Schluter, D. </a:t>
-            </a:r>
-            <a:r>
-              <a:rPr i="1"/>
-              <a:t>The Analysis of Biological Data</a:t>
-            </a:r>
-            <a:r>
-              <a:rPr/>
-              <a:t> (2nd ed.), Ch. 17.</a:t>
-            </a:r>
-          </a:p>
-          <a:p>
-            <a:pPr lvl="0"/>
-            <a:r>
-              <a:rPr/>
-              <a:t>Wickham, H. </a:t>
-            </a:r>
-            <a:r>
-              <a:rPr i="1"/>
-              <a:t>R for Data Science (2nd ed.)</a:t>
-            </a:r>
-            <a:r>
-              <a:rPr/>
-              <a:t> — </a:t>
-            </a:r>
-            <a:r>
-              <a:rPr>
-                <a:hlinkClick r:id="rId2"/>
-              </a:rPr>
-              <a:t>https://r4ds.hadley.nz/</a:t>
+              <a:t>Table 4 applies the calibration equation to two example tracings. The heavier shady-side tracing has the larger predicted area — consistent with our earlier finding that shady leaves are larger.</a:t>
             </a:r>
           </a:p>
         </p:txBody>
